--- a/submission/Doctor_Dev_Hackathon_Presentation_Deck.pptx
+++ b/submission/Doctor_Dev_Hackathon_Presentation_Deck.pptx
@@ -869,7 +869,7 @@
           <a:lstStyle xmlns:a="http://schemas.openxmlformats.org/drawingml/2006/main"/>
           <a:p xmlns:a="http://schemas.openxmlformats.org/drawingml/2006/main">
             <a:r>
-              <a:t>Source: supplied project README, IBM Bob section. Session-summary screenshots are separate required submission evidence and are not represented in this deck.</a:t>
+              <a:t>Source: project README, architecture and security sections.</a:t>
             </a:r>
           </a:p>
         </p:txBody>
@@ -1635,7 +1635,7 @@
                 <a:ea typeface="Bitstream Charter"/>
                 <a:cs typeface="Bitstream Charter"/>
               </a:rPr>
-              <a:t>DOCTOR DEV  /  IBM BOB 2.0 HACKATHON</a:t>
+              <a:t>DOCTOR DEV</a:t>
             </a:r>
           </a:p>
         </p:txBody>
@@ -2211,7 +2211,7 @@
                 <a:ea typeface="Bitstream Charter"/>
                 <a:cs typeface="Bitstream Charter"/>
               </a:rPr>
-              <a:t>DOCTOR DEV  /  IBM BOB 2.0 HACKATHON</a:t>
+              <a:t>DOCTOR DEV</a:t>
             </a:r>
           </a:p>
         </p:txBody>
@@ -3101,7 +3101,7 @@
                 <a:ea typeface="Bitstream Charter"/>
                 <a:cs typeface="Bitstream Charter"/>
               </a:rPr>
-              <a:t>DOCTOR DEV  /  IBM BOB 2.0 HACKATHON</a:t>
+              <a:t>DOCTOR DEV</a:t>
             </a:r>
           </a:p>
         </p:txBody>
@@ -3988,7 +3988,7 @@
                 <a:ea typeface="Bitstream Charter"/>
                 <a:cs typeface="Bitstream Charter"/>
               </a:rPr>
-              <a:t>DOCTOR DEV  /  IBM BOB 2.0 HACKATHON</a:t>
+              <a:t>DOCTOR DEV</a:t>
             </a:r>
           </a:p>
         </p:txBody>
@@ -4583,7 +4583,7 @@
                 <a:ea typeface="Bitstream Charter"/>
                 <a:cs typeface="Bitstream Charter"/>
               </a:rPr>
-              <a:t>DOCTOR DEV  /  IBM BOB 2.0 HACKATHON</a:t>
+              <a:t>DOCTOR DEV</a:t>
             </a:r>
           </a:p>
         </p:txBody>
@@ -5276,7 +5276,7 @@
                 <a:ea typeface="Bitstream Charter"/>
                 <a:cs typeface="Bitstream Charter"/>
               </a:rPr>
-              <a:t>DOCTOR DEV  /  IBM BOB 2.0 HACKATHON</a:t>
+              <a:t>DOCTOR DEV</a:t>
             </a:r>
           </a:p>
         </p:txBody>
@@ -5757,7 +5757,7 @@
                 <a:ea typeface="Bitstream Charter"/>
                 <a:cs typeface="Bitstream Charter"/>
               </a:rPr>
-              <a:t>DOCTOR DEV  /  IBM BOB 2.0 HACKATHON</a:t>
+              <a:t>DOCTOR DEV</a:t>
             </a:r>
           </a:p>
         </p:txBody>
@@ -5871,7 +5871,7 @@
                 <a:ea typeface="Bitstream Charter"/>
                 <a:cs typeface="Bitstream Charter"/>
               </a:rPr>
-              <a:t>Built with IBM Bob 2.0</a:t>
+              <a:t>How it is built</a:t>
             </a:r>
           </a:p>
         </p:txBody>
@@ -5928,7 +5928,7 @@
                 <a:ea typeface="Bitstream Charter"/>
                 <a:cs typeface="Bitstream Charter"/>
               </a:rPr>
-              <a:t>Bob helped reason across the repository, from analyzer logic through UI, security and review.</a:t>
+              <a:t>One connected model of the repository, from analyzer logic through UI, security and review.</a:t>
             </a:r>
           </a:p>
         </p:txBody>
@@ -6590,7 +6590,7 @@
                 <a:ea typeface="Bitstream Charter"/>
                 <a:cs typeface="Bitstream Charter"/>
               </a:rPr>
-              <a:t>DOCTOR DEV  /  IBM BOB 2.0 HACKATHON</a:t>
+              <a:t>DOCTOR DEV</a:t>
             </a:r>
           </a:p>
         </p:txBody>
